--- a/submission/SUTRA_Solution_Presentation.pptx
+++ b/submission/SUTRA_Solution_Presentation.pptx
@@ -118,278 +118,6 @@
 </p:presentation>
 </file>
 
-<file path=ppt/charts/chart1.xml><?xml version="1.0" encoding="utf-8"?>
-<c:chartSpace xmlns:c="http://schemas.openxmlformats.org/drawingml/2006/chart" xmlns:a="http://schemas.openxmlformats.org/drawingml/2006/main" xmlns:r="http://schemas.openxmlformats.org/officeDocument/2006/relationships">
-  <c:date1904 val="0"/>
-  <c:roundedCorners val="1"/>
-  <c:chart>
-    <c:title>
-      <c:tx>
-        <c:rich>
-          <a:bodyPr/>
-          <a:lstStyle/>
-          <a:p>
-            <a:pPr>
-              <a:defRPr sz="1200" b="0" i="0" u="none" strike="noStrike">
-                <a:solidFill>
-                  <a:srgbClr val="FFFFFF"/>
-                </a:solidFill>
-                <a:latin typeface="Calibri"/>
-              </a:defRPr>
-            </a:pPr>
-            <a:r>
-              <a:rPr sz="1200" b="0" i="0" u="none" strike="noStrike">
-                <a:solidFill>
-                  <a:srgbClr val="FFFFFF"/>
-                </a:solidFill>
-                <a:latin typeface="Calibri"/>
-              </a:rPr>
-              <a:t>Portal throughput does not scale with connections</a:t>
-            </a:r>
-          </a:p>
-        </c:rich>
-      </c:tx>
-      <c:layout/>
-      <c:overlay val="0"/>
-    </c:title>
-    <c:autoTitleDeleted val="0"/>
-    <c:plotArea>
-      <c:layout/>
-      <c:barChart>
-        <c:barDir val="col"/>
-        <c:grouping val="clustered"/>
-        <c:varyColors val="0"/>
-        <c:ser>
-          <c:idx val="0"/>
-          <c:order val="0"/>
-          <c:tx>
-            <c:strRef>
-              <c:f>Sheet1!$B$1</c:f>
-              <c:strCache>
-                <c:ptCount val="1"/>
-                <c:pt idx="0">
-                  <c:v>Aggregate delivered (Mbps)</c:v>
-                </c:pt>
-              </c:strCache>
-            </c:strRef>
-          </c:tx>
-          <c:spPr>
-            <a:solidFill>
-              <a:srgbClr val="F0A428"/>
-            </a:solidFill>
-            <a:effectLst/>
-          </c:spPr>
-          <c:invertIfNegative val="0"/>
-          <c:dLbls>
-            <c:numFmt formatCode="0.0" sourceLinked="0"/>
-            <c:txPr>
-              <a:bodyPr/>
-              <a:lstStyle/>
-              <a:p>
-                <a:pPr>
-                  <a:defRPr b="0" i="0" strike="noStrike" sz="1100" u="none">
-                    <a:solidFill>
-                      <a:srgbClr val="FFFFFF"/>
-                    </a:solidFill>
-                    <a:latin typeface="Calibri"/>
-                  </a:defRPr>
-                </a:pPr>
-              </a:p>
-            </c:txPr>
-            <c:showLegendKey val="0"/>
-            <c:showVal val="1"/>
-            <c:showCatName val="0"/>
-            <c:showSerName val="0"/>
-            <c:showPercent val="0"/>
-            <c:showBubbleSize val="0"/>
-            <c:showLeaderLines val="0"/>
-          </c:dLbls>
-          <c:cat>
-            <c:multiLvlStrRef>
-              <c:f>Sheet1!$A$2:$A$4</c:f>
-              <c:multiLvlStrCache>
-                <c:ptCount val="3"/>
-                <c:lvl>
-                  <c:pt idx="0">
-                    <c:v>4 streams</c:v>
-                  </c:pt>
-                  <c:pt idx="1">
-                    <c:v>10 streams</c:v>
-                  </c:pt>
-                  <c:pt idx="2">
-                    <c:v>20 streams</c:v>
-                  </c:pt>
-                </c:lvl>
-              </c:multiLvlStrCache>
-            </c:multiLvlStrRef>
-          </c:cat>
-          <c:val>
-            <c:numRef>
-              <c:f>Sheet1!$B$2:$B$4</c:f>
-              <c:numCache>
-                <c:formatCode>General</c:formatCode>
-                <c:ptCount val="3"/>
-                <c:pt idx="0">
-                  <c:v>1.5</c:v>
-                </c:pt>
-                <c:pt idx="1">
-                  <c:v>5</c:v>
-                </c:pt>
-                <c:pt idx="2">
-                  <c:v>5.4</c:v>
-                </c:pt>
-              </c:numCache>
-            </c:numRef>
-          </c:val>
-        </c:ser>
-        <c:dLbls>
-          <c:numFmt formatCode="0.0" sourceLinked="0"/>
-          <c:txPr>
-            <a:bodyPr/>
-            <a:lstStyle/>
-            <a:p>
-              <a:pPr>
-                <a:defRPr b="0" i="0" strike="noStrike" sz="1100" u="none">
-                  <a:solidFill>
-                    <a:srgbClr val="FFFFFF"/>
-                  </a:solidFill>
-                  <a:latin typeface="Calibri"/>
-                </a:defRPr>
-              </a:pPr>
-            </a:p>
-          </c:txPr>
-          <c:showLegendKey val="0"/>
-          <c:showVal val="1"/>
-          <c:showCatName val="0"/>
-          <c:showSerName val="0"/>
-          <c:showPercent val="0"/>
-          <c:showBubbleSize val="0"/>
-          <c:showLeaderLines val="0"/>
-        </c:dLbls>
-        <c:gapWidth val="150"/>
-        <c:overlap val="0"/>
-        <c:axId val="2094734554"/>
-        <c:axId val="2094734552"/>
-        <c:axId val="2094734556"/>
-      </c:barChart>
-      <c:catAx>
-        <c:axId val="2094734554"/>
-        <c:scaling>
-          <c:orientation val="minMax"/>
-        </c:scaling>
-        <c:delete val="0"/>
-        <c:axPos val="b"/>
-        <c:numFmt formatCode="General" sourceLinked="1"/>
-        <c:majorTickMark val="out"/>
-        <c:minorTickMark val="none"/>
-        <c:tickLblPos val="low"/>
-        <c:spPr>
-          <a:ln w="12700" cap="flat">
-            <a:solidFill>
-              <a:srgbClr val="888888"/>
-            </a:solidFill>
-            <a:prstDash val="solid"/>
-            <a:round/>
-          </a:ln>
-        </c:spPr>
-        <c:txPr>
-          <a:bodyPr/>
-          <a:lstStyle/>
-          <a:p>
-            <a:pPr>
-              <a:defRPr sz="1100" b="0" i="0" u="none" strike="noStrike">
-                <a:solidFill>
-                  <a:srgbClr val="CBD8E8"/>
-                </a:solidFill>
-                <a:latin typeface="Calibri"/>
-              </a:defRPr>
-            </a:pPr>
-            <a:endParaRPr lang="en-US"/>
-          </a:p>
-        </c:txPr>
-        <c:crossAx val="2094734552"/>
-        <c:crosses val="autoZero"/>
-        <c:auto val="1"/>
-        <c:lblAlgn val="ctr"/>
-        <c:noMultiLvlLbl val="1"/>
-      </c:catAx>
-      <c:valAx>
-        <c:axId val="2094734552"/>
-        <c:scaling>
-          <c:orientation val="minMax"/>
-          <c:max val="7"/>
-        </c:scaling>
-        <c:delete val="0"/>
-        <c:axPos val="l"/>
-        <c:majorGridlines>
-          <c:spPr>
-            <a:ln w="12700" cap="flat">
-              <a:solidFill>
-                <a:srgbClr val="24405E"/>
-              </a:solidFill>
-              <a:prstDash val="solid"/>
-              <a:round/>
-            </a:ln>
-          </c:spPr>
-        </c:majorGridlines>
-        <c:numFmt formatCode="General" sourceLinked="0"/>
-        <c:majorTickMark val="out"/>
-        <c:minorTickMark val="none"/>
-        <c:tickLblPos val="nextTo"/>
-        <c:spPr>
-          <a:ln w="12700" cap="flat">
-            <a:solidFill>
-              <a:srgbClr val="888888"/>
-            </a:solidFill>
-            <a:prstDash val="solid"/>
-            <a:round/>
-          </a:ln>
-        </c:spPr>
-        <c:txPr>
-          <a:bodyPr/>
-          <a:lstStyle/>
-          <a:p>
-            <a:pPr>
-              <a:defRPr sz="1000" b="0" i="0" u="none" strike="noStrike">
-                <a:solidFill>
-                  <a:srgbClr val="8A9BB0"/>
-                </a:solidFill>
-                <a:latin typeface="Calibri"/>
-              </a:defRPr>
-            </a:pPr>
-            <a:endParaRPr lang="en-US"/>
-          </a:p>
-        </c:txPr>
-        <c:crossAx val="2094734554"/>
-        <c:crosses val="autoZero"/>
-        <c:crossBetween val="between"/>
-      </c:valAx>
-      <c:spPr>
-        <a:solidFill>
-          <a:srgbClr val="0E1A2B"/>
-        </a:solidFill>
-        <a:ln>
-          <a:noFill/>
-        </a:ln>
-        <a:effectLst/>
-      </c:spPr>
-    </c:plotArea>
-    <c:plotVisOnly val="1"/>
-    <c:dispBlanksAs val="span"/>
-  </c:chart>
-  <c:spPr>
-    <a:noFill/>
-    <a:ln>
-      <a:noFill/>
-    </a:ln>
-    <a:effectLst/>
-  </c:spPr>
-  <c:externalData r:id="rId1">
-    <c:autoUpdate val="0"/>
-  </c:externalData>
-</c:chartSpace>
-</file>
-
 <file path=ppt/notesMasters/notesMaster1.xml><?xml version="1.0" encoding="utf-8"?>
 <p:notesMaster xmlns:a="http://schemas.openxmlformats.org/drawingml/2006/main" xmlns:r="http://schemas.openxmlformats.org/officeDocument/2006/relationships" xmlns:p="http://schemas.openxmlformats.org/presentationml/2006/main">
   <p:cSld>
@@ -1665,7 +1393,7 @@
           <a:p>
             <a:r>
               <a:rPr lang="en-US" dirty="0"/>
-              <a:t>This is the differentiator: characterising the infrastructure and designing to it, rather than assuming bandwidth and reporting failures as errors.</a:t>
+              <a:t>This is the differentiator: the sandbox changed protocol, host and access model three times during the build, and only the adapter layer changed with it. That is the property a 26-department rollout needs. Credentials never enter the registry: injected at stream-open, redacted everywhere else.</a:t>
             </a:r>
             <a:endParaRPr lang="en-US" dirty="0"/>
           </a:p>
@@ -2585,7 +2313,7 @@
                 <a:ea typeface="Cambria" pitchFamily="34" charset="-122"/>
                 <a:cs typeface="Cambria" pitchFamily="34" charset="-120"/>
               </a:rPr>
-              <a:t>59</a:t>
+              <a:t>68</a:t>
             </a:r>
             <a:endParaRPr lang="en-US" sz="2500" dirty="0"/>
           </a:p>
@@ -7162,7 +6890,7 @@
                 <a:ea typeface="Calibri" pitchFamily="34" charset="-122"/>
                 <a:cs typeface="Calibri" pitchFamily="34" charset="-120"/>
               </a:rPr>
-              <a:t>http-progressive · RTSP over TCP · file · HLS/ONVIF-ready · adaptive ingest scheduler · shared MJPEG relay</a:t>
+              <a:t>RTSP over TCP (credentialed) · cookie-gated HLS · http-progressive · file · ONVIF-ready · adaptive ingest scheduler · shared MJPEG relay</a:t>
             </a:r>
             <a:endParaRPr lang="en-US" sz="1150" dirty="0"/>
           </a:p>
@@ -10463,7 +10191,7 @@
                 <a:ea typeface="Cambria" pitchFamily="34" charset="-122"/>
                 <a:cs typeface="Cambria" pitchFamily="34" charset="-120"/>
               </a:rPr>
-              <a:t>We measured the network before designing for it</a:t>
+              <a:t>The sandbox moved three times. The platform did not.</a:t>
             </a:r>
             <a:endParaRPr lang="en-US" sz="3200" dirty="0"/>
           </a:p>
@@ -10478,7 +10206,7 @@
         <p:spPr>
           <a:xfrm>
             <a:off x="548640" y="1481328"/>
-            <a:ext cx="11064240" cy="566928"/>
+            <a:ext cx="11064240" cy="658368"/>
           </a:xfrm>
           <a:prstGeom prst="rect">
             <a:avLst/>
@@ -10505,7 +10233,7 @@
                 <a:ea typeface="Calibri" pitchFamily="34" charset="-122"/>
                 <a:cs typeface="Calibri" pitchFamily="34" charset="-120"/>
               </a:rPr>
-              <a:t>The sandbox portal rations delivery per client IP. Independent probes at 10 and 20 concurrent connections returned the same aggregate — so opening more streams only thins each one. This is the constraint a statewide rollout actually faces.</a:t>
+              <a:t>Integration is where statewide rollouts fail: every department is a different vendor, protocol and access model. The hackathon sandbox rehearsed exactly that by changing under us — and SUTRA's adapter + discovery layer absorbed every change without touching registry, analytics, alerting or UI.</a:t>
             </a:r>
             <a:endParaRPr lang="en-US" sz="1300" dirty="0"/>
           </a:p>
@@ -10513,17 +10241,856 @@
       </p:sp>
       <p:graphicFrame>
         <p:nvGraphicFramePr>
-          <p:cNvPr id="5" name="Chart 0" descr=""/>
-          <p:cNvGraphicFramePr/>
-          <p:nvPr/>
+          <p:cNvPr id="9" name="Table 0"/>
+          <p:cNvGraphicFramePr>
+            <a:graphicFrameLocks noGrp="1"/>
+          </p:cNvGraphicFramePr>
+          <p:nvPr>
+            <p:extLst>
+              <p:ext uri="{D42A27DB-BD31-4B8C-83A1-F6EECF244321}">
+                <p14:modId xmlns:p14="http://schemas.microsoft.com/office/powerpoint/2010/main" val="1579011935"/>
+              </p:ext>
+            </p:extLst>
+          </p:nvPr>
         </p:nvGraphicFramePr>
         <p:xfrm>
-          <a:off x="548640" y="2240280"/>
-          <a:ext cx="5486400" cy="3200400"/>
+          <a:off x="548640" y="2286000"/>
+          <a:ext cx="5760720" cy="914400"/>
         </p:xfrm>
-        <a:graphic xmlns:a="http://schemas.openxmlformats.org/drawingml/2006/main">
-          <a:graphicData uri="http://schemas.openxmlformats.org/drawingml/2006/chart">
-            <c:chart xmlns:c="http://schemas.openxmlformats.org/drawingml/2006/chart" r:id="rId1"/>
+        <a:graphic>
+          <a:graphicData uri="http://schemas.openxmlformats.org/drawingml/2006/table">
+            <a:tbl>
+              <a:tblPr/>
+              <a:tblGrid>
+                <a:gridCol w="1417320"/>
+                <a:gridCol w="2331720"/>
+                <a:gridCol w="2011680"/>
+              </a:tblGrid>
+              <a:tr h="310896">
+                <a:tc>
+                  <a:txBody>
+                    <a:bodyPr/>
+                    <a:lstStyle/>
+                    <a:p>
+                      <a:pPr indent="0" marL="0">
+                        <a:buNone/>
+                      </a:pPr>
+                      <a:r>
+                        <a:rPr lang="en-US" sz="1050" b="1" dirty="0">
+                          <a:solidFill>
+                            <a:srgbClr val="FFFFFF"/>
+                          </a:solidFill>
+                          <a:latin typeface="Calibri" pitchFamily="34" charset="0"/>
+                          <a:ea typeface="Calibri" pitchFamily="34" charset="-122"/>
+                          <a:cs typeface="Calibri" pitchFamily="34" charset="-120"/>
+                        </a:rPr>
+                        <a:t>Portal generation</a:t>
+                      </a:r>
+                      <a:endParaRPr lang="en-US" sz="1050" dirty="0">
+                        <a:latin typeface="Calibri" charset="0"/>
+                        <a:ea typeface="Calibri" charset="0"/>
+                        <a:cs typeface="Calibri" charset="0"/>
+                      </a:endParaRPr>
+                    </a:p>
+                  </a:txBody>
+                  <a:tcPr marL="54864" marR="54864" marT="54864" marB="54864" anchor="t">
+                    <a:lnL w="9525" cap="flat" cmpd="sng" algn="ctr">
+                      <a:solidFill>
+                        <a:srgbClr val="24405E"/>
+                      </a:solidFill>
+                      <a:prstDash val="solid"/>
+                      <a:round/>
+                      <a:headEnd type="none" w="med" len="med"/>
+                      <a:tailEnd type="none" w="med" len="med"/>
+                    </a:lnL>
+                    <a:lnR w="9525" cap="flat" cmpd="sng" algn="ctr">
+                      <a:solidFill>
+                        <a:srgbClr val="24405E"/>
+                      </a:solidFill>
+                      <a:prstDash val="solid"/>
+                      <a:round/>
+                      <a:headEnd type="none" w="med" len="med"/>
+                      <a:tailEnd type="none" w="med" len="med"/>
+                    </a:lnR>
+                    <a:lnT w="9525" cap="flat" cmpd="sng" algn="ctr">
+                      <a:solidFill>
+                        <a:srgbClr val="24405E"/>
+                      </a:solidFill>
+                      <a:prstDash val="solid"/>
+                      <a:round/>
+                      <a:headEnd type="none" w="med" len="med"/>
+                      <a:tailEnd type="none" w="med" len="med"/>
+                    </a:lnT>
+                    <a:lnB w="9525" cap="flat" cmpd="sng" algn="ctr">
+                      <a:solidFill>
+                        <a:srgbClr val="24405E"/>
+                      </a:solidFill>
+                      <a:prstDash val="solid"/>
+                      <a:round/>
+                      <a:headEnd type="none" w="med" len="med"/>
+                      <a:tailEnd type="none" w="med" len="med"/>
+                    </a:lnB>
+                    <a:solidFill>
+                      <a:srgbClr val="24405E"/>
+                    </a:solidFill>
+                  </a:tcPr>
+                </a:tc>
+                <a:tc>
+                  <a:txBody>
+                    <a:bodyPr/>
+                    <a:lstStyle/>
+                    <a:p>
+                      <a:pPr indent="0" marL="0">
+                        <a:buNone/>
+                      </a:pPr>
+                      <a:r>
+                        <a:rPr lang="en-US" sz="1050" b="1" dirty="0">
+                          <a:solidFill>
+                            <a:srgbClr val="FFFFFF"/>
+                          </a:solidFill>
+                          <a:latin typeface="Calibri" pitchFamily="34" charset="0"/>
+                          <a:ea typeface="Calibri" pitchFamily="34" charset="-122"/>
+                          <a:cs typeface="Calibri" pitchFamily="34" charset="-120"/>
+                        </a:rPr>
+                        <a:t>What the source looked like</a:t>
+                      </a:r>
+                      <a:endParaRPr lang="en-US" sz="1050" dirty="0">
+                        <a:latin typeface="Calibri" charset="0"/>
+                        <a:ea typeface="Calibri" charset="0"/>
+                        <a:cs typeface="Calibri" charset="0"/>
+                      </a:endParaRPr>
+                    </a:p>
+                  </a:txBody>
+                  <a:tcPr marL="54864" marR="54864" marT="54864" marB="54864" anchor="t">
+                    <a:lnL w="9525" cap="flat" cmpd="sng" algn="ctr">
+                      <a:solidFill>
+                        <a:srgbClr val="24405E"/>
+                      </a:solidFill>
+                      <a:prstDash val="solid"/>
+                      <a:round/>
+                      <a:headEnd type="none" w="med" len="med"/>
+                      <a:tailEnd type="none" w="med" len="med"/>
+                    </a:lnL>
+                    <a:lnR w="9525" cap="flat" cmpd="sng" algn="ctr">
+                      <a:solidFill>
+                        <a:srgbClr val="24405E"/>
+                      </a:solidFill>
+                      <a:prstDash val="solid"/>
+                      <a:round/>
+                      <a:headEnd type="none" w="med" len="med"/>
+                      <a:tailEnd type="none" w="med" len="med"/>
+                    </a:lnR>
+                    <a:lnT w="9525" cap="flat" cmpd="sng" algn="ctr">
+                      <a:solidFill>
+                        <a:srgbClr val="24405E"/>
+                      </a:solidFill>
+                      <a:prstDash val="solid"/>
+                      <a:round/>
+                      <a:headEnd type="none" w="med" len="med"/>
+                      <a:tailEnd type="none" w="med" len="med"/>
+                    </a:lnT>
+                    <a:lnB w="9525" cap="flat" cmpd="sng" algn="ctr">
+                      <a:solidFill>
+                        <a:srgbClr val="24405E"/>
+                      </a:solidFill>
+                      <a:prstDash val="solid"/>
+                      <a:round/>
+                      <a:headEnd type="none" w="med" len="med"/>
+                      <a:tailEnd type="none" w="med" len="med"/>
+                    </a:lnB>
+                    <a:solidFill>
+                      <a:srgbClr val="24405E"/>
+                    </a:solidFill>
+                  </a:tcPr>
+                </a:tc>
+                <a:tc>
+                  <a:txBody>
+                    <a:bodyPr/>
+                    <a:lstStyle/>
+                    <a:p>
+                      <a:pPr indent="0" marL="0">
+                        <a:buNone/>
+                      </a:pPr>
+                      <a:r>
+                        <a:rPr lang="en-US" sz="1050" b="1" dirty="0">
+                          <a:solidFill>
+                            <a:srgbClr val="FFFFFF"/>
+                          </a:solidFill>
+                          <a:latin typeface="Calibri" pitchFamily="34" charset="0"/>
+                          <a:ea typeface="Calibri" pitchFamily="34" charset="-122"/>
+                          <a:cs typeface="Calibri" pitchFamily="34" charset="-120"/>
+                        </a:rPr>
+                        <a:t>What SUTRA changed</a:t>
+                      </a:r>
+                      <a:endParaRPr lang="en-US" sz="1050" dirty="0">
+                        <a:latin typeface="Calibri" charset="0"/>
+                        <a:ea typeface="Calibri" charset="0"/>
+                        <a:cs typeface="Calibri" charset="0"/>
+                      </a:endParaRPr>
+                    </a:p>
+                  </a:txBody>
+                  <a:tcPr marL="54864" marR="54864" marT="54864" marB="54864" anchor="t">
+                    <a:lnL w="9525" cap="flat" cmpd="sng" algn="ctr">
+                      <a:solidFill>
+                        <a:srgbClr val="24405E"/>
+                      </a:solidFill>
+                      <a:prstDash val="solid"/>
+                      <a:round/>
+                      <a:headEnd type="none" w="med" len="med"/>
+                      <a:tailEnd type="none" w="med" len="med"/>
+                    </a:lnL>
+                    <a:lnR w="9525" cap="flat" cmpd="sng" algn="ctr">
+                      <a:solidFill>
+                        <a:srgbClr val="24405E"/>
+                      </a:solidFill>
+                      <a:prstDash val="solid"/>
+                      <a:round/>
+                      <a:headEnd type="none" w="med" len="med"/>
+                      <a:tailEnd type="none" w="med" len="med"/>
+                    </a:lnR>
+                    <a:lnT w="9525" cap="flat" cmpd="sng" algn="ctr">
+                      <a:solidFill>
+                        <a:srgbClr val="24405E"/>
+                      </a:solidFill>
+                      <a:prstDash val="solid"/>
+                      <a:round/>
+                      <a:headEnd type="none" w="med" len="med"/>
+                      <a:tailEnd type="none" w="med" len="med"/>
+                    </a:lnT>
+                    <a:lnB w="9525" cap="flat" cmpd="sng" algn="ctr">
+                      <a:solidFill>
+                        <a:srgbClr val="24405E"/>
+                      </a:solidFill>
+                      <a:prstDash val="solid"/>
+                      <a:round/>
+                      <a:headEnd type="none" w="med" len="med"/>
+                      <a:tailEnd type="none" w="med" len="med"/>
+                    </a:lnB>
+                    <a:solidFill>
+                      <a:srgbClr val="24405E"/>
+                    </a:solidFill>
+                  </a:tcPr>
+                </a:tc>
+              </a:tr>
+              <a:tr h="713232">
+                <a:tc>
+                  <a:txBody>
+                    <a:bodyPr/>
+                    <a:lstStyle/>
+                    <a:p>
+                      <a:pPr indent="0" marL="0">
+                        <a:buNone/>
+                      </a:pPr>
+                      <a:r>
+                        <a:rPr lang="en-US" sz="1000" dirty="0">
+                          <a:solidFill>
+                            <a:srgbClr val="CBD8E8"/>
+                          </a:solidFill>
+                          <a:latin typeface="Calibri" pitchFamily="34" charset="0"/>
+                          <a:ea typeface="Calibri" pitchFamily="34" charset="-122"/>
+                          <a:cs typeface="Calibri" pitchFamily="34" charset="-120"/>
+                        </a:rPr>
+                        <a:t>Aug · live.sentinelgujarat.in</a:t>
+                      </a:r>
+                      <a:endParaRPr lang="en-US" sz="1000" dirty="0">
+                        <a:latin typeface="Calibri" charset="0"/>
+                        <a:ea typeface="Calibri" charset="0"/>
+                        <a:cs typeface="Calibri" charset="0"/>
+                      </a:endParaRPr>
+                    </a:p>
+                  </a:txBody>
+                  <a:tcPr marL="54864" marR="54864" marT="54864" marB="54864" anchor="t">
+                    <a:lnL w="9525" cap="flat" cmpd="sng" algn="ctr">
+                      <a:solidFill>
+                        <a:srgbClr val="24405E"/>
+                      </a:solidFill>
+                      <a:prstDash val="solid"/>
+                      <a:round/>
+                      <a:headEnd type="none" w="med" len="med"/>
+                      <a:tailEnd type="none" w="med" len="med"/>
+                    </a:lnL>
+                    <a:lnR w="9525" cap="flat" cmpd="sng" algn="ctr">
+                      <a:solidFill>
+                        <a:srgbClr val="24405E"/>
+                      </a:solidFill>
+                      <a:prstDash val="solid"/>
+                      <a:round/>
+                      <a:headEnd type="none" w="med" len="med"/>
+                      <a:tailEnd type="none" w="med" len="med"/>
+                    </a:lnR>
+                    <a:lnT w="9525" cap="flat" cmpd="sng" algn="ctr">
+                      <a:solidFill>
+                        <a:srgbClr val="24405E"/>
+                      </a:solidFill>
+                      <a:prstDash val="solid"/>
+                      <a:round/>
+                      <a:headEnd type="none" w="med" len="med"/>
+                      <a:tailEnd type="none" w="med" len="med"/>
+                    </a:lnT>
+                    <a:lnB w="9525" cap="flat" cmpd="sng" algn="ctr">
+                      <a:solidFill>
+                        <a:srgbClr val="24405E"/>
+                      </a:solidFill>
+                      <a:prstDash val="solid"/>
+                      <a:round/>
+                      <a:headEnd type="none" w="med" len="med"/>
+                      <a:tailEnd type="none" w="med" len="med"/>
+                    </a:lnB>
+                    <a:solidFill>
+                      <a:srgbClr val="0E1A2B"/>
+                    </a:solidFill>
+                  </a:tcPr>
+                </a:tc>
+                <a:tc>
+                  <a:txBody>
+                    <a:bodyPr/>
+                    <a:lstStyle/>
+                    <a:p>
+                      <a:pPr indent="0" marL="0">
+                        <a:buNone/>
+                      </a:pPr>
+                      <a:r>
+                        <a:rPr lang="en-US" sz="1000" dirty="0">
+                          <a:solidFill>
+                            <a:srgbClr val="CBD8E8"/>
+                          </a:solidFill>
+                          <a:latin typeface="Calibri" pitchFamily="34" charset="0"/>
+                          <a:ea typeface="Calibri" pitchFamily="34" charset="-122"/>
+                          <a:cs typeface="Calibri" pitchFamily="34" charset="-120"/>
+                        </a:rPr>
+                        <a:t>Progressive MP4/MKV/AVI chunks, ~5 Mb/s per client IP, 48 s to first frame</a:t>
+                      </a:r>
+                      <a:endParaRPr lang="en-US" sz="1000" dirty="0">
+                        <a:latin typeface="Calibri" charset="0"/>
+                        <a:ea typeface="Calibri" charset="0"/>
+                        <a:cs typeface="Calibri" charset="0"/>
+                      </a:endParaRPr>
+                    </a:p>
+                  </a:txBody>
+                  <a:tcPr marL="54864" marR="54864" marT="54864" marB="54864" anchor="t">
+                    <a:lnL w="9525" cap="flat" cmpd="sng" algn="ctr">
+                      <a:solidFill>
+                        <a:srgbClr val="24405E"/>
+                      </a:solidFill>
+                      <a:prstDash val="solid"/>
+                      <a:round/>
+                      <a:headEnd type="none" w="med" len="med"/>
+                      <a:tailEnd type="none" w="med" len="med"/>
+                    </a:lnL>
+                    <a:lnR w="9525" cap="flat" cmpd="sng" algn="ctr">
+                      <a:solidFill>
+                        <a:srgbClr val="24405E"/>
+                      </a:solidFill>
+                      <a:prstDash val="solid"/>
+                      <a:round/>
+                      <a:headEnd type="none" w="med" len="med"/>
+                      <a:tailEnd type="none" w="med" len="med"/>
+                    </a:lnR>
+                    <a:lnT w="9525" cap="flat" cmpd="sng" algn="ctr">
+                      <a:solidFill>
+                        <a:srgbClr val="24405E"/>
+                      </a:solidFill>
+                      <a:prstDash val="solid"/>
+                      <a:round/>
+                      <a:headEnd type="none" w="med" len="med"/>
+                      <a:tailEnd type="none" w="med" len="med"/>
+                    </a:lnT>
+                    <a:lnB w="9525" cap="flat" cmpd="sng" algn="ctr">
+                      <a:solidFill>
+                        <a:srgbClr val="24405E"/>
+                      </a:solidFill>
+                      <a:prstDash val="solid"/>
+                      <a:round/>
+                      <a:headEnd type="none" w="med" len="med"/>
+                      <a:tailEnd type="none" w="med" len="med"/>
+                    </a:lnB>
+                    <a:solidFill>
+                      <a:srgbClr val="0E1A2B"/>
+                    </a:solidFill>
+                  </a:tcPr>
+                </a:tc>
+                <a:tc>
+                  <a:txBody>
+                    <a:bodyPr/>
+                    <a:lstStyle/>
+                    <a:p>
+                      <a:pPr indent="0" marL="0">
+                        <a:buNone/>
+                      </a:pPr>
+                      <a:r>
+                        <a:rPr lang="en-US" sz="1000" dirty="0">
+                          <a:solidFill>
+                            <a:srgbClr val="CBD8E8"/>
+                          </a:solidFill>
+                          <a:latin typeface="Calibri" pitchFamily="34" charset="0"/>
+                          <a:ea typeface="Calibri" pitchFamily="34" charset="-122"/>
+                          <a:cs typeface="Calibri" pitchFamily="34" charset="-120"/>
+                        </a:rPr>
+                        <a:t>Adaptive scheduler sized to the source; http-progressive adapter</a:t>
+                      </a:r>
+                      <a:endParaRPr lang="en-US" sz="1000" dirty="0">
+                        <a:latin typeface="Calibri" charset="0"/>
+                        <a:ea typeface="Calibri" charset="0"/>
+                        <a:cs typeface="Calibri" charset="0"/>
+                      </a:endParaRPr>
+                    </a:p>
+                  </a:txBody>
+                  <a:tcPr marL="54864" marR="54864" marT="54864" marB="54864" anchor="t">
+                    <a:lnL w="9525" cap="flat" cmpd="sng" algn="ctr">
+                      <a:solidFill>
+                        <a:srgbClr val="24405E"/>
+                      </a:solidFill>
+                      <a:prstDash val="solid"/>
+                      <a:round/>
+                      <a:headEnd type="none" w="med" len="med"/>
+                      <a:tailEnd type="none" w="med" len="med"/>
+                    </a:lnL>
+                    <a:lnR w="9525" cap="flat" cmpd="sng" algn="ctr">
+                      <a:solidFill>
+                        <a:srgbClr val="24405E"/>
+                      </a:solidFill>
+                      <a:prstDash val="solid"/>
+                      <a:round/>
+                      <a:headEnd type="none" w="med" len="med"/>
+                      <a:tailEnd type="none" w="med" len="med"/>
+                    </a:lnR>
+                    <a:lnT w="9525" cap="flat" cmpd="sng" algn="ctr">
+                      <a:solidFill>
+                        <a:srgbClr val="24405E"/>
+                      </a:solidFill>
+                      <a:prstDash val="solid"/>
+                      <a:round/>
+                      <a:headEnd type="none" w="med" len="med"/>
+                      <a:tailEnd type="none" w="med" len="med"/>
+                    </a:lnT>
+                    <a:lnB w="9525" cap="flat" cmpd="sng" algn="ctr">
+                      <a:solidFill>
+                        <a:srgbClr val="24405E"/>
+                      </a:solidFill>
+                      <a:prstDash val="solid"/>
+                      <a:round/>
+                      <a:headEnd type="none" w="med" len="med"/>
+                      <a:tailEnd type="none" w="med" len="med"/>
+                    </a:lnB>
+                    <a:solidFill>
+                      <a:srgbClr val="0E1A2B"/>
+                    </a:solidFill>
+                  </a:tcPr>
+                </a:tc>
+              </a:tr>
+              <a:tr h="548640">
+                <a:tc>
+                  <a:txBody>
+                    <a:bodyPr/>
+                    <a:lstStyle/>
+                    <a:p>
+                      <a:pPr indent="0" marL="0">
+                        <a:buNone/>
+                      </a:pPr>
+                      <a:r>
+                        <a:rPr lang="en-US" sz="1000" dirty="0">
+                          <a:solidFill>
+                            <a:srgbClr val="CBD8E8"/>
+                          </a:solidFill>
+                          <a:latin typeface="Calibri" pitchFamily="34" charset="0"/>
+                          <a:ea typeface="Calibri" pitchFamily="34" charset="-122"/>
+                          <a:cs typeface="Calibri" pitchFamily="34" charset="-120"/>
+                        </a:rPr>
+                        <a:t>Aug · live.corp8.cloud</a:t>
+                      </a:r>
+                      <a:endParaRPr lang="en-US" sz="1000" dirty="0">
+                        <a:latin typeface="Calibri" charset="0"/>
+                        <a:ea typeface="Calibri" charset="0"/>
+                        <a:cs typeface="Calibri" charset="0"/>
+                      </a:endParaRPr>
+                    </a:p>
+                  </a:txBody>
+                  <a:tcPr marL="54864" marR="54864" marT="54864" marB="54864" anchor="t">
+                    <a:lnL w="9525" cap="flat" cmpd="sng" algn="ctr">
+                      <a:solidFill>
+                        <a:srgbClr val="24405E"/>
+                      </a:solidFill>
+                      <a:prstDash val="solid"/>
+                      <a:round/>
+                      <a:headEnd type="none" w="med" len="med"/>
+                      <a:tailEnd type="none" w="med" len="med"/>
+                    </a:lnL>
+                    <a:lnR w="9525" cap="flat" cmpd="sng" algn="ctr">
+                      <a:solidFill>
+                        <a:srgbClr val="24405E"/>
+                      </a:solidFill>
+                      <a:prstDash val="solid"/>
+                      <a:round/>
+                      <a:headEnd type="none" w="med" len="med"/>
+                      <a:tailEnd type="none" w="med" len="med"/>
+                    </a:lnR>
+                    <a:lnT w="9525" cap="flat" cmpd="sng" algn="ctr">
+                      <a:solidFill>
+                        <a:srgbClr val="24405E"/>
+                      </a:solidFill>
+                      <a:prstDash val="solid"/>
+                      <a:round/>
+                      <a:headEnd type="none" w="med" len="med"/>
+                      <a:tailEnd type="none" w="med" len="med"/>
+                    </a:lnT>
+                    <a:lnB w="9525" cap="flat" cmpd="sng" algn="ctr">
+                      <a:solidFill>
+                        <a:srgbClr val="24405E"/>
+                      </a:solidFill>
+                      <a:prstDash val="solid"/>
+                      <a:round/>
+                      <a:headEnd type="none" w="med" len="med"/>
+                      <a:tailEnd type="none" w="med" len="med"/>
+                    </a:lnB>
+                    <a:solidFill>
+                      <a:srgbClr val="0E1A2B"/>
+                    </a:solidFill>
+                  </a:tcPr>
+                </a:tc>
+                <a:tc>
+                  <a:txBody>
+                    <a:bodyPr/>
+                    <a:lstStyle/>
+                    <a:p>
+                      <a:pPr indent="0" marL="0">
+                        <a:buNone/>
+                      </a:pPr>
+                      <a:r>
+                        <a:rPr lang="en-US" sz="1000" dirty="0">
+                          <a:solidFill>
+                            <a:srgbClr val="CBD8E8"/>
+                          </a:solidFill>
+                          <a:latin typeface="Calibri" pitchFamily="34" charset="0"/>
+                          <a:ea typeface="Calibri" pitchFamily="34" charset="-122"/>
+                          <a:cs typeface="Calibri" pitchFamily="34" charset="-120"/>
+                        </a:rPr>
+                        <a:t>Same API, new host, wider camera set</a:t>
+                      </a:r>
+                      <a:endParaRPr lang="en-US" sz="1000" dirty="0">
+                        <a:latin typeface="Calibri" charset="0"/>
+                        <a:ea typeface="Calibri" charset="0"/>
+                        <a:cs typeface="Calibri" charset="0"/>
+                      </a:endParaRPr>
+                    </a:p>
+                  </a:txBody>
+                  <a:tcPr marL="54864" marR="54864" marT="54864" marB="54864" anchor="t">
+                    <a:lnL w="9525" cap="flat" cmpd="sng" algn="ctr">
+                      <a:solidFill>
+                        <a:srgbClr val="24405E"/>
+                      </a:solidFill>
+                      <a:prstDash val="solid"/>
+                      <a:round/>
+                      <a:headEnd type="none" w="med" len="med"/>
+                      <a:tailEnd type="none" w="med" len="med"/>
+                    </a:lnL>
+                    <a:lnR w="9525" cap="flat" cmpd="sng" algn="ctr">
+                      <a:solidFill>
+                        <a:srgbClr val="24405E"/>
+                      </a:solidFill>
+                      <a:prstDash val="solid"/>
+                      <a:round/>
+                      <a:headEnd type="none" w="med" len="med"/>
+                      <a:tailEnd type="none" w="med" len="med"/>
+                    </a:lnR>
+                    <a:lnT w="9525" cap="flat" cmpd="sng" algn="ctr">
+                      <a:solidFill>
+                        <a:srgbClr val="24405E"/>
+                      </a:solidFill>
+                      <a:prstDash val="solid"/>
+                      <a:round/>
+                      <a:headEnd type="none" w="med" len="med"/>
+                      <a:tailEnd type="none" w="med" len="med"/>
+                    </a:lnT>
+                    <a:lnB w="9525" cap="flat" cmpd="sng" algn="ctr">
+                      <a:solidFill>
+                        <a:srgbClr val="24405E"/>
+                      </a:solidFill>
+                      <a:prstDash val="solid"/>
+                      <a:round/>
+                      <a:headEnd type="none" w="med" len="med"/>
+                      <a:tailEnd type="none" w="med" len="med"/>
+                    </a:lnB>
+                    <a:solidFill>
+                      <a:srgbClr val="0E1A2B"/>
+                    </a:solidFill>
+                  </a:tcPr>
+                </a:tc>
+                <a:tc>
+                  <a:txBody>
+                    <a:bodyPr/>
+                    <a:lstStyle/>
+                    <a:p>
+                      <a:pPr indent="0" marL="0">
+                        <a:buNone/>
+                      </a:pPr>
+                      <a:r>
+                        <a:rPr lang="en-US" sz="1000" dirty="0">
+                          <a:solidFill>
+                            <a:srgbClr val="CBD8E8"/>
+                          </a:solidFill>
+                          <a:latin typeface="Calibri" pitchFamily="34" charset="0"/>
+                          <a:ea typeface="Calibri" pitchFamily="34" charset="-122"/>
+                          <a:cs typeface="Calibri" pitchFamily="34" charset="-120"/>
+                        </a:rPr>
+                        <a:t>Discovery keyed on stable ids — rows updated in place</a:t>
+                      </a:r>
+                      <a:endParaRPr lang="en-US" sz="1000" dirty="0">
+                        <a:latin typeface="Calibri" charset="0"/>
+                        <a:ea typeface="Calibri" charset="0"/>
+                        <a:cs typeface="Calibri" charset="0"/>
+                      </a:endParaRPr>
+                    </a:p>
+                  </a:txBody>
+                  <a:tcPr marL="54864" marR="54864" marT="54864" marB="54864" anchor="t">
+                    <a:lnL w="9525" cap="flat" cmpd="sng" algn="ctr">
+                      <a:solidFill>
+                        <a:srgbClr val="24405E"/>
+                      </a:solidFill>
+                      <a:prstDash val="solid"/>
+                      <a:round/>
+                      <a:headEnd type="none" w="med" len="med"/>
+                      <a:tailEnd type="none" w="med" len="med"/>
+                    </a:lnL>
+                    <a:lnR w="9525" cap="flat" cmpd="sng" algn="ctr">
+                      <a:solidFill>
+                        <a:srgbClr val="24405E"/>
+                      </a:solidFill>
+                      <a:prstDash val="solid"/>
+                      <a:round/>
+                      <a:headEnd type="none" w="med" len="med"/>
+                      <a:tailEnd type="none" w="med" len="med"/>
+                    </a:lnR>
+                    <a:lnT w="9525" cap="flat" cmpd="sng" algn="ctr">
+                      <a:solidFill>
+                        <a:srgbClr val="24405E"/>
+                      </a:solidFill>
+                      <a:prstDash val="solid"/>
+                      <a:round/>
+                      <a:headEnd type="none" w="med" len="med"/>
+                      <a:tailEnd type="none" w="med" len="med"/>
+                    </a:lnT>
+                    <a:lnB w="9525" cap="flat" cmpd="sng" algn="ctr">
+                      <a:solidFill>
+                        <a:srgbClr val="24405E"/>
+                      </a:solidFill>
+                      <a:prstDash val="solid"/>
+                      <a:round/>
+                      <a:headEnd type="none" w="med" len="med"/>
+                      <a:tailEnd type="none" w="med" len="med"/>
+                    </a:lnB>
+                    <a:solidFill>
+                      <a:srgbClr val="0E1A2B"/>
+                    </a:solidFill>
+                  </a:tcPr>
+                </a:tc>
+              </a:tr>
+              <a:tr h="822960">
+                <a:tc>
+                  <a:txBody>
+                    <a:bodyPr/>
+                    <a:lstStyle/>
+                    <a:p>
+                      <a:pPr indent="0" marL="0">
+                        <a:buNone/>
+                      </a:pPr>
+                      <a:r>
+                        <a:rPr lang="en-US" sz="1000" dirty="0">
+                          <a:solidFill>
+                            <a:srgbClr val="CBD8E8"/>
+                          </a:solidFill>
+                          <a:latin typeface="Calibri" pitchFamily="34" charset="0"/>
+                          <a:ea typeface="Calibri" pitchFamily="34" charset="-122"/>
+                          <a:cs typeface="Calibri" pitchFamily="34" charset="-120"/>
+                        </a:rPr>
+                        <a:t>Sep · cctv.corp8.cloud</a:t>
+                      </a:r>
+                      <a:endParaRPr lang="en-US" sz="1000" dirty="0">
+                        <a:latin typeface="Calibri" charset="0"/>
+                        <a:ea typeface="Calibri" charset="0"/>
+                        <a:cs typeface="Calibri" charset="0"/>
+                      </a:endParaRPr>
+                    </a:p>
+                  </a:txBody>
+                  <a:tcPr marL="54864" marR="54864" marT="54864" marB="54864" anchor="t">
+                    <a:lnL w="9525" cap="flat" cmpd="sng" algn="ctr">
+                      <a:solidFill>
+                        <a:srgbClr val="24405E"/>
+                      </a:solidFill>
+                      <a:prstDash val="solid"/>
+                      <a:round/>
+                      <a:headEnd type="none" w="med" len="med"/>
+                      <a:tailEnd type="none" w="med" len="med"/>
+                    </a:lnL>
+                    <a:lnR w="9525" cap="flat" cmpd="sng" algn="ctr">
+                      <a:solidFill>
+                        <a:srgbClr val="24405E"/>
+                      </a:solidFill>
+                      <a:prstDash val="solid"/>
+                      <a:round/>
+                      <a:headEnd type="none" w="med" len="med"/>
+                      <a:tailEnd type="none" w="med" len="med"/>
+                    </a:lnR>
+                    <a:lnT w="9525" cap="flat" cmpd="sng" algn="ctr">
+                      <a:solidFill>
+                        <a:srgbClr val="24405E"/>
+                      </a:solidFill>
+                      <a:prstDash val="solid"/>
+                      <a:round/>
+                      <a:headEnd type="none" w="med" len="med"/>
+                      <a:tailEnd type="none" w="med" len="med"/>
+                    </a:lnT>
+                    <a:lnB w="9525" cap="flat" cmpd="sng" algn="ctr">
+                      <a:solidFill>
+                        <a:srgbClr val="24405E"/>
+                      </a:solidFill>
+                      <a:prstDash val="solid"/>
+                      <a:round/>
+                      <a:headEnd type="none" w="med" len="med"/>
+                      <a:tailEnd type="none" w="med" len="med"/>
+                    </a:lnB>
+                    <a:solidFill>
+                      <a:srgbClr val="0E1A2B"/>
+                    </a:solidFill>
+                  </a:tcPr>
+                </a:tc>
+                <a:tc>
+                  <a:txBody>
+                    <a:bodyPr/>
+                    <a:lstStyle/>
+                    <a:p>
+                      <a:pPr indent="0" marL="0">
+                        <a:buNone/>
+                      </a:pPr>
+                      <a:r>
+                        <a:rPr lang="en-US" sz="1000" dirty="0">
+                          <a:solidFill>
+                            <a:srgbClr val="CBD8E8"/>
+                          </a:solidFill>
+                          <a:latin typeface="Calibri" pitchFamily="34" charset="0"/>
+                          <a:ea typeface="Calibri" pitchFamily="34" charset="-122"/>
+                          <a:cs typeface="Calibri" pitchFamily="34" charset="-120"/>
+                        </a:rPr>
+                        <a:t>Login-gated catalogue, credentialed RTSP (H.264 + H.265), AES-encrypted cookie HLS, looping feeds</a:t>
+                      </a:r>
+                      <a:endParaRPr lang="en-US" sz="1000" dirty="0">
+                        <a:latin typeface="Calibri" charset="0"/>
+                        <a:ea typeface="Calibri" charset="0"/>
+                        <a:cs typeface="Calibri" charset="0"/>
+                      </a:endParaRPr>
+                    </a:p>
+                  </a:txBody>
+                  <a:tcPr marL="54864" marR="54864" marT="54864" marB="54864" anchor="t">
+                    <a:lnL w="9525" cap="flat" cmpd="sng" algn="ctr">
+                      <a:solidFill>
+                        <a:srgbClr val="24405E"/>
+                      </a:solidFill>
+                      <a:prstDash val="solid"/>
+                      <a:round/>
+                      <a:headEnd type="none" w="med" len="med"/>
+                      <a:tailEnd type="none" w="med" len="med"/>
+                    </a:lnL>
+                    <a:lnR w="9525" cap="flat" cmpd="sng" algn="ctr">
+                      <a:solidFill>
+                        <a:srgbClr val="24405E"/>
+                      </a:solidFill>
+                      <a:prstDash val="solid"/>
+                      <a:round/>
+                      <a:headEnd type="none" w="med" len="med"/>
+                      <a:tailEnd type="none" w="med" len="med"/>
+                    </a:lnR>
+                    <a:lnT w="9525" cap="flat" cmpd="sng" algn="ctr">
+                      <a:solidFill>
+                        <a:srgbClr val="24405E"/>
+                      </a:solidFill>
+                      <a:prstDash val="solid"/>
+                      <a:round/>
+                      <a:headEnd type="none" w="med" len="med"/>
+                      <a:tailEnd type="none" w="med" len="med"/>
+                    </a:lnT>
+                    <a:lnB w="9525" cap="flat" cmpd="sng" algn="ctr">
+                      <a:solidFill>
+                        <a:srgbClr val="24405E"/>
+                      </a:solidFill>
+                      <a:prstDash val="solid"/>
+                      <a:round/>
+                      <a:headEnd type="none" w="med" len="med"/>
+                      <a:tailEnd type="none" w="med" len="med"/>
+                    </a:lnB>
+                    <a:solidFill>
+                      <a:srgbClr val="0E1A2B"/>
+                    </a:solidFill>
+                  </a:tcPr>
+                </a:tc>
+                <a:tc>
+                  <a:txBody>
+                    <a:bodyPr/>
+                    <a:lstStyle/>
+                    <a:p>
+                      <a:pPr indent="0" marL="0">
+                        <a:buNone/>
+                      </a:pPr>
+                      <a:r>
+                        <a:rPr lang="en-US" sz="1000" dirty="0">
+                          <a:solidFill>
+                            <a:srgbClr val="CBD8E8"/>
+                          </a:solidFill>
+                          <a:latin typeface="Calibri" pitchFamily="34" charset="0"/>
+                          <a:ea typeface="Calibri" pitchFamily="34" charset="-122"/>
+                          <a:cs typeface="Calibri" pitchFamily="34" charset="-120"/>
+                        </a:rPr>
+                        <a:t>Portal session module, RTSP + HLS adapters, PTS-safe sampling, credential redaction</a:t>
+                      </a:r>
+                      <a:endParaRPr lang="en-US" sz="1000" dirty="0">
+                        <a:latin typeface="Calibri" charset="0"/>
+                        <a:ea typeface="Calibri" charset="0"/>
+                        <a:cs typeface="Calibri" charset="0"/>
+                      </a:endParaRPr>
+                    </a:p>
+                  </a:txBody>
+                  <a:tcPr marL="54864" marR="54864" marT="54864" marB="54864" anchor="t">
+                    <a:lnL w="9525" cap="flat" cmpd="sng" algn="ctr">
+                      <a:solidFill>
+                        <a:srgbClr val="24405E"/>
+                      </a:solidFill>
+                      <a:prstDash val="solid"/>
+                      <a:round/>
+                      <a:headEnd type="none" w="med" len="med"/>
+                      <a:tailEnd type="none" w="med" len="med"/>
+                    </a:lnL>
+                    <a:lnR w="9525" cap="flat" cmpd="sng" algn="ctr">
+                      <a:solidFill>
+                        <a:srgbClr val="24405E"/>
+                      </a:solidFill>
+                      <a:prstDash val="solid"/>
+                      <a:round/>
+                      <a:headEnd type="none" w="med" len="med"/>
+                      <a:tailEnd type="none" w="med" len="med"/>
+                    </a:lnR>
+                    <a:lnT w="9525" cap="flat" cmpd="sng" algn="ctr">
+                      <a:solidFill>
+                        <a:srgbClr val="24405E"/>
+                      </a:solidFill>
+                      <a:prstDash val="solid"/>
+                      <a:round/>
+                      <a:headEnd type="none" w="med" len="med"/>
+                      <a:tailEnd type="none" w="med" len="med"/>
+                    </a:lnT>
+                    <a:lnB w="9525" cap="flat" cmpd="sng" algn="ctr">
+                      <a:solidFill>
+                        <a:srgbClr val="24405E"/>
+                      </a:solidFill>
+                      <a:prstDash val="solid"/>
+                      <a:round/>
+                      <a:headEnd type="none" w="med" len="med"/>
+                      <a:tailEnd type="none" w="med" len="med"/>
+                    </a:lnB>
+                    <a:solidFill>
+                      <a:srgbClr val="0E1A2B"/>
+                    </a:solidFill>
+                  </a:tcPr>
+                </a:tc>
+              </a:tr>
+            </a:tbl>
           </a:graphicData>
         </a:graphic>
       </p:graphicFrame>
@@ -10535,8 +11102,8 @@
         </p:nvSpPr>
         <p:spPr>
           <a:xfrm>
-            <a:off x="6263640" y="2240280"/>
-            <a:ext cx="5349240" cy="822960"/>
+            <a:off x="6537960" y="2240280"/>
+            <a:ext cx="5074920" cy="822960"/>
           </a:xfrm>
           <a:prstGeom prst="roundRect">
             <a:avLst>
@@ -10564,7 +11131,7 @@
         </p:nvSpPr>
         <p:spPr>
           <a:xfrm>
-            <a:off x="6510528" y="2386584"/>
+            <a:off x="6784848" y="2386584"/>
             <a:ext cx="1417320" cy="384048"/>
           </a:xfrm>
           <a:prstGeom prst="rect">
@@ -10589,7 +11156,7 @@
                 <a:ea typeface="Cambria" pitchFamily="34" charset="-122"/>
                 <a:cs typeface="Cambria" pitchFamily="34" charset="-120"/>
               </a:rPr>
-              <a:t>~5 Mbps</a:t>
+              <a:t>~10 s</a:t>
             </a:r>
             <a:endParaRPr lang="en-US" sz="2100" dirty="0"/>
           </a:p>
@@ -10603,8 +11170,8 @@
         </p:nvSpPr>
         <p:spPr>
           <a:xfrm>
-            <a:off x="7973568" y="2386584"/>
-            <a:ext cx="3429000" cy="548640"/>
+            <a:off x="8247888" y="2386584"/>
+            <a:ext cx="3246120" cy="548640"/>
           </a:xfrm>
           <a:prstGeom prst="rect">
             <a:avLst/>
@@ -10631,7 +11198,7 @@
                 <a:ea typeface="Calibri" pitchFamily="34" charset="-122"/>
                 <a:cs typeface="Calibri" pitchFamily="34" charset="-120"/>
               </a:rPr>
-              <a:t>hard ceiling per client IP, regardless of connection count</a:t>
+              <a:t>to first frame on the September RTSP gateway, TCP-forced; each client gets its own copy</a:t>
             </a:r>
             <a:endParaRPr lang="en-US" sz="1150" dirty="0"/>
           </a:p>
@@ -10645,8 +11212,8 @@
         </p:nvSpPr>
         <p:spPr>
           <a:xfrm>
-            <a:off x="6263640" y="3172968"/>
-            <a:ext cx="5349240" cy="822960"/>
+            <a:off x="6537960" y="3172968"/>
+            <a:ext cx="5074920" cy="822960"/>
           </a:xfrm>
           <a:prstGeom prst="roundRect">
             <a:avLst>
@@ -10674,7 +11241,7 @@
         </p:nvSpPr>
         <p:spPr>
           <a:xfrm>
-            <a:off x="6510528" y="3319272"/>
+            <a:off x="6784848" y="3319272"/>
             <a:ext cx="1417320" cy="384048"/>
           </a:xfrm>
           <a:prstGeom prst="rect">
@@ -10699,7 +11266,7 @@
                 <a:ea typeface="Cambria" pitchFamily="34" charset="-122"/>
                 <a:cs typeface="Cambria" pitchFamily="34" charset="-120"/>
               </a:rPr>
-              <a:t>48 s</a:t>
+              <a:t>30 / 30</a:t>
             </a:r>
             <a:endParaRPr lang="en-US" sz="2100" dirty="0"/>
           </a:p>
@@ -10713,8 +11280,8 @@
         </p:nvSpPr>
         <p:spPr>
           <a:xfrm>
-            <a:off x="7973568" y="3319272"/>
-            <a:ext cx="3429000" cy="548640"/>
+            <a:off x="8247888" y="3319272"/>
+            <a:ext cx="3246120" cy="548640"/>
           </a:xfrm>
           <a:prstGeom prst="rect">
             <a:avLst/>
@@ -10741,7 +11308,7 @@
                 <a:ea typeface="Calibri" pitchFamily="34" charset="-122"/>
                 <a:cs typeface="Calibri" pitchFamily="34" charset="-120"/>
               </a:rPr>
-              <a:t>measured time to first frame — a short dwell window never yields a picture</a:t>
+              <a:t>cameras re-discovered in place after the rehost — detection history preserved</a:t>
             </a:r>
             <a:endParaRPr lang="en-US" sz="1150" dirty="0"/>
           </a:p>
@@ -10755,8 +11322,8 @@
         </p:nvSpPr>
         <p:spPr>
           <a:xfrm>
-            <a:off x="6263640" y="4105656"/>
-            <a:ext cx="5349240" cy="822960"/>
+            <a:off x="6537960" y="4105656"/>
+            <a:ext cx="5074920" cy="822960"/>
           </a:xfrm>
           <a:prstGeom prst="roundRect">
             <a:avLst>
@@ -10784,7 +11351,7 @@
         </p:nvSpPr>
         <p:spPr>
           <a:xfrm>
-            <a:off x="6510528" y="4251960"/>
+            <a:off x="6784848" y="4251960"/>
             <a:ext cx="1417320" cy="384048"/>
           </a:xfrm>
           <a:prstGeom prst="rect">
@@ -10809,7 +11376,7 @@
                 <a:ea typeface="Cambria" pitchFamily="34" charset="-122"/>
                 <a:cs typeface="Cambria" pitchFamily="34" charset="-120"/>
               </a:rPr>
-              <a:t>3–4</a:t>
+              <a:t>0</a:t>
             </a:r>
             <a:endParaRPr lang="en-US" sz="2100" dirty="0"/>
           </a:p>
@@ -10823,8 +11390,8 @@
         </p:nvSpPr>
         <p:spPr>
           <a:xfrm>
-            <a:off x="7973568" y="4251960"/>
-            <a:ext cx="3429000" cy="548640"/>
+            <a:off x="8247888" y="4251960"/>
+            <a:ext cx="3246120" cy="548640"/>
           </a:xfrm>
           <a:prstGeom prst="rect">
             <a:avLst/>
@@ -10851,7 +11418,7 @@
                 <a:ea typeface="Calibri" pitchFamily="34" charset="-122"/>
                 <a:cs typeface="Calibri" pitchFamily="34" charset="-120"/>
               </a:rPr>
-              <a:t>streams decodable in real time per IP, at ~1.5 Mbps each</a:t>
+              <a:t>changes to analytics, alerting or UI code across all three portal generations</a:t>
             </a:r>
             <a:endParaRPr lang="en-US" sz="1150" dirty="0"/>
           </a:p>
@@ -10865,8 +11432,8 @@
         </p:nvSpPr>
         <p:spPr>
           <a:xfrm>
-            <a:off x="6263640" y="5074920"/>
-            <a:ext cx="5349240" cy="1234440"/>
+            <a:off x="6537960" y="5074920"/>
+            <a:ext cx="5074920" cy="1234440"/>
           </a:xfrm>
           <a:prstGeom prst="roundRect">
             <a:avLst>
@@ -10894,8 +11461,8 @@
         </p:nvSpPr>
         <p:spPr>
           <a:xfrm>
-            <a:off x="6510528" y="5257800"/>
-            <a:ext cx="4846320" cy="274320"/>
+            <a:off x="6784848" y="5257800"/>
+            <a:ext cx="4663440" cy="274320"/>
           </a:xfrm>
           <a:prstGeom prst="rect">
             <a:avLst/>
@@ -10919,7 +11486,7 @@
                 <a:ea typeface="Cambria" pitchFamily="34" charset="-122"/>
                 <a:cs typeface="Cambria" pitchFamily="34" charset="-120"/>
               </a:rPr>
-              <a:t>So the scheduler is designed for it</a:t>
+              <a:t>So the scheduler is designed for the source</a:t>
             </a:r>
             <a:endParaRPr lang="en-US" sz="1350" dirty="0"/>
           </a:p>
@@ -10933,8 +11500,8 @@
         </p:nvSpPr>
         <p:spPr>
           <a:xfrm>
-            <a:off x="6510528" y="5559552"/>
-            <a:ext cx="4846320" cy="658368"/>
+            <a:off x="6784848" y="5559552"/>
+            <a:ext cx="4663440" cy="658368"/>
           </a:xfrm>
           <a:prstGeom prst="rect">
             <a:avLst/>
@@ -10961,7 +11528,7 @@
                 <a:ea typeface="Calibri" pitchFamily="34" charset="-122"/>
                 <a:cs typeface="Calibri" pitchFamily="34" charset="-120"/>
               </a:rPr>
-              <a:t>A concurrency budget sized to the source, 10-minute dwell rotation with least-recently-served fairness, operator pinning and alert-boost. All 30 network cameras are covered over time instead of 30 fighting for four sessions at once.</a:t>
+              <a:t>A concurrency budget sized to what the source sustains, 10-minute dwell rotation with least-recently-served fairness, operator pinning and alert-boost. All 30 network cameras are covered over time on one commodity machine.</a:t>
             </a:r>
             <a:endParaRPr lang="en-US" sz="1100" dirty="0"/>
           </a:p>

--- a/submission/SUTRA_Solution_Presentation.pptx
+++ b/submission/SUTRA_Solution_Presentation.pptx
@@ -2313,7 +2313,7 @@
                 <a:ea typeface="Cambria" pitchFamily="34" charset="-122"/>
                 <a:cs typeface="Cambria" pitchFamily="34" charset="-120"/>
               </a:rPr>
-              <a:t>68</a:t>
+              <a:t>174</a:t>
             </a:r>
             <a:endParaRPr lang="en-US" sz="2500" dirty="0"/>
           </a:p>
@@ -4227,7 +4227,7 @@
                 <a:ea typeface="Calibri" pitchFamily="34" charset="-122"/>
                 <a:cs typeface="Calibri" pitchFamily="34" charset="-120"/>
               </a:rPr>
-              <a:t>17/17 live API endpoints green · 59 automated tests passing · zero duplicate records · real accumulated data from the government feeds</a:t>
+              <a:t>17/17 live API endpoints green · 174 automated tests passing · zero duplicate records · real accumulated data from the government feeds</a:t>
             </a:r>
             <a:endParaRPr lang="en-US" sz="1250" dirty="0"/>
           </a:p>

--- a/submission/SUTRA_Solution_Presentation.pptx
+++ b/submission/SUTRA_Solution_Presentation.pptx
@@ -2030,7 +2030,7 @@
                 <a:ea typeface="Calibri" pitchFamily="34" charset="-122"/>
                 <a:cs typeface="Calibri" pitchFamily="34" charset="-120"/>
               </a:rPr>
-              <a:t>Category 1 · Individual entry · Lavesh Paryani</a:t>
+              <a:t>Category 1 · Lavesh Paryani and Hiral Kotwani</a:t>
             </a:r>
             <a:endParaRPr lang="en-US" sz="1300" dirty="0"/>
           </a:p>
@@ -2313,7 +2313,7 @@
                 <a:ea typeface="Cambria" pitchFamily="34" charset="-122"/>
                 <a:cs typeface="Cambria" pitchFamily="34" charset="-120"/>
               </a:rPr>
-              <a:t>174</a:t>
+              <a:t>175</a:t>
             </a:r>
             <a:endParaRPr lang="en-US" sz="2500" dirty="0"/>
           </a:p>
@@ -4227,7 +4227,7 @@
                 <a:ea typeface="Calibri" pitchFamily="34" charset="-122"/>
                 <a:cs typeface="Calibri" pitchFamily="34" charset="-120"/>
               </a:rPr>
-              <a:t>17/17 live API endpoints green · 174 automated tests passing · zero duplicate records · real accumulated data from the government feeds</a:t>
+              <a:t>17/17 live API endpoints green · 175 automated tests passing · zero duplicate records · real accumulated data from the government feeds</a:t>
             </a:r>
             <a:endParaRPr lang="en-US" sz="1250" dirty="0"/>
           </a:p>
